--- a/youtube/Claude_Code_with_OpenRouter.pptx
+++ b/youtube/Claude_Code_with_OpenRouter.pptx
@@ -2285,7 +2285,7 @@
           <a:p>
             <a:r>
               <a:rPr lang="en-US" dirty="0"/>
-              <a:t>Show scripts/orclaude. It's tiny: set the base URL to OpenRouter, set the auth token to your OpenRouter key, set the model to whatever slug you passed in, then exec claude with the rest of the arguments. No remapping, no case block, no aliases. The slug you type is the model that runs. Note: slugs drift; check OpenRouter for current names.</a:t>
+              <a:t>Show scripts/orclaude. Set the base URL to OpenRouter, the auth token to your OpenRouter key, then pass the slug straight through as --model. Why the flag? If you've ever picked a model with /model, settings.json pins it and the env vars alone get silently ignored - I got burned by this. The flag outranks the settings file; same mechanism ollama launch claude uses. The tier variables catch sub-agents. Prove it with scripts/orclaude-smoke: it checks which model the request was billed against. Don't ask the model its name - DeepSeek answered "Hello! I'm Claude Code." Note: slugs drift; check OpenRouter for current names.</a:t>
             </a:r>
             <a:endParaRPr lang="en-US" dirty="0"/>
           </a:p>
@@ -2373,7 +2373,7 @@
           <a:p>
             <a:r>
               <a:rPr lang="en-US" dirty="0"/>
-              <a:t>If you'd rather not keep a wrapper script on your PATH, Claude Code reads the same settings from a JSON file. Put an env block in .claude/settings.local.json with the same three variables. The .local file is git-ignored by default, so your OpenRouter key never lands in version control. Same effect as the script, just persistent and per-project instead of per-invocation. Use whichever fits your workflow; the book covers both.</a:t>
+              <a:t>If you'd rather not keep a wrapper script on your PATH, Claude Code reads the same settings from a JSON file. Put an env block in .claude/settings.local.json with the same three variables. The .local file is git-ignored by default, so your OpenRouter key never lands in version control. Same effect as the script, just persistent and per-project instead of per-invocation. Use whichever fits your workflow; the book covers both, and a ready-to-copy template ships in the example repo as scripts/settings.local.json.example.</a:t>
             </a:r>
             <a:endParaRPr lang="en-US" dirty="0"/>
           </a:p>
@@ -3021,7 +3021,7 @@
                 <a:ea typeface="Arial" pitchFamily="34" charset="-122"/>
                 <a:cs typeface="Arial" pitchFamily="34" charset="-120"/>
               </a:rPr>
-              <a:t>One bash script runs </a:t>
+              <a:t xml:space="preserve">One bash script runs </a:t>
             </a:r>
             <a:pPr algn="l" indent="0" marL="0">
               <a:lnSpc>
@@ -3038,7 +3038,7 @@
                 <a:ea typeface="Arial" pitchFamily="34" charset="-122"/>
                 <a:cs typeface="Arial" pitchFamily="34" charset="-120"/>
               </a:rPr>
-              <a:t>Claude Code </a:t>
+              <a:t xml:space="preserve">Claude Code </a:t>
             </a:r>
             <a:pPr algn="l" indent="0" marL="0">
               <a:lnSpc>
@@ -3358,7 +3358,7 @@
                 <a:ea typeface="Courier New" pitchFamily="34" charset="-122"/>
                 <a:cs typeface="Courier New" pitchFamily="34" charset="-120"/>
               </a:rPr>
-              <a:t>❯ </a:t>
+              <a:t xml:space="preserve">❯ </a:t>
             </a:r>
             <a:pPr algn="l" indent="0" marL="0">
               <a:lnSpc>
@@ -3612,7 +3612,7 @@
                 <a:ea typeface="Courier New" pitchFamily="34" charset="-122"/>
                 <a:cs typeface="Courier New" pitchFamily="34" charset="-120"/>
               </a:rPr>
-              <a:t>That’s Claude Code. </a:t>
+              <a:t xml:space="preserve">That’s Claude Code. </a:t>
             </a:r>
             <a:pPr algn="l" indent="0" marL="0">
               <a:buNone/>
@@ -3626,7 +3626,7 @@
                 <a:ea typeface="Courier New" pitchFamily="34" charset="-122"/>
                 <a:cs typeface="Courier New" pitchFamily="34" charset="-120"/>
               </a:rPr>
-              <a:t>Not </a:t>
+              <a:t xml:space="preserve">Not </a:t>
             </a:r>
             <a:pPr algn="l" indent="0" marL="0">
               <a:buNone/>
@@ -3862,7 +3862,7 @@
                 <a:ea typeface="Arial" pitchFamily="34" charset="-122"/>
                 <a:cs typeface="Arial" pitchFamily="34" charset="-120"/>
               </a:rPr>
-              <a:t>Explicit models first — then the routers, with </a:t>
+              <a:t xml:space="preserve">Explicit models first — then the routers, with </a:t>
             </a:r>
             <a:pPr algn="l" indent="0" marL="0">
               <a:buNone/>
@@ -3876,7 +3876,7 @@
                 <a:ea typeface="Courier New" pitchFamily="34" charset="-122"/>
                 <a:cs typeface="Courier New" pitchFamily="34" charset="-120"/>
               </a:rPr>
-              <a:t>free </a:t>
+              <a:t xml:space="preserve">free </a:t>
             </a:r>
             <a:pPr algn="l" indent="0" marL="0">
               <a:buNone/>
@@ -6057,7 +6057,7 @@
                 <a:ea typeface="Courier New" pitchFamily="34" charset="-122"/>
                 <a:cs typeface="Courier New" pitchFamily="34" charset="-120"/>
               </a:rPr>
-              <a:t>❯ </a:t>
+              <a:t xml:space="preserve">❯ </a:t>
             </a:r>
             <a:pPr algn="l" indent="0" marL="0">
               <a:lnSpc>
@@ -6651,7 +6651,7 @@
                 <a:ea typeface="Courier New" pitchFamily="34" charset="-122"/>
                 <a:cs typeface="Courier New" pitchFamily="34" charset="-120"/>
               </a:rPr>
-              <a:t>❯ </a:t>
+              <a:t xml:space="preserve">❯ </a:t>
             </a:r>
             <a:pPr algn="l" indent="0" marL="0">
               <a:lnSpc>
@@ -7265,7 +7265,7 @@
                 <a:ea typeface="Courier New" pitchFamily="34" charset="-122"/>
                 <a:cs typeface="Courier New" pitchFamily="34" charset="-120"/>
               </a:rPr>
-              <a:t>❯ </a:t>
+              <a:t xml:space="preserve">❯ </a:t>
             </a:r>
             <a:pPr algn="l" indent="0" marL="0">
               <a:lnSpc>
@@ -7859,7 +7859,7 @@
                 <a:ea typeface="Courier New" pitchFamily="34" charset="-122"/>
                 <a:cs typeface="Courier New" pitchFamily="34" charset="-120"/>
               </a:rPr>
-              <a:t>❯ </a:t>
+              <a:t xml:space="preserve">❯ </a:t>
             </a:r>
             <a:pPr algn="l" indent="0" marL="0">
               <a:lnSpc>
@@ -8165,7 +8165,7 @@
                 <a:ea typeface="Arial" pitchFamily="34" charset="-122"/>
                 <a:cs typeface="Arial" pitchFamily="34" charset="-120"/>
               </a:rPr>
-              <a:t>Now you don’t even </a:t>
+              <a:t xml:space="preserve">Now you don’t even </a:t>
             </a:r>
             <a:pPr algn="l" indent="0" marL="0">
               <a:lnSpc>
@@ -8226,7 +8226,7 @@
                 <a:ea typeface="Arial" pitchFamily="34" charset="-122"/>
                 <a:cs typeface="Arial" pitchFamily="34" charset="-120"/>
               </a:rPr>
-              <a:t>Up to now I’ve </a:t>
+              <a:t xml:space="preserve">Up to now I’ve </a:t>
             </a:r>
             <a:pPr algn="l" indent="0" marL="0">
               <a:lnSpc>
@@ -8243,7 +8243,7 @@
                 <a:ea typeface="Arial" pitchFamily="34" charset="-122"/>
                 <a:cs typeface="Arial" pitchFamily="34" charset="-120"/>
               </a:rPr>
-              <a:t>named </a:t>
+              <a:t xml:space="preserve">named </a:t>
             </a:r>
             <a:pPr algn="l" indent="0" marL="0">
               <a:lnSpc>
@@ -8260,7 +8260,7 @@
                 <a:ea typeface="Arial" pitchFamily="34" charset="-122"/>
                 <a:cs typeface="Arial" pitchFamily="34" charset="-120"/>
               </a:rPr>
-              <a:t>the model every time. OpenRouter has routers — where </a:t>
+              <a:t xml:space="preserve">the model every time. OpenRouter has routers — where </a:t>
             </a:r>
             <a:pPr algn="l" indent="0" marL="0">
               <a:lnSpc>
@@ -8277,7 +8277,7 @@
                 <a:ea typeface="Arial" pitchFamily="34" charset="-122"/>
                 <a:cs typeface="Arial" pitchFamily="34" charset="-120"/>
               </a:rPr>
-              <a:t>it </a:t>
+              <a:t xml:space="preserve">it </a:t>
             </a:r>
             <a:pPr algn="l" indent="0" marL="0">
               <a:lnSpc>
@@ -8778,7 +8778,7 @@
                 <a:ea typeface="Courier New" pitchFamily="34" charset="-122"/>
                 <a:cs typeface="Courier New" pitchFamily="34" charset="-120"/>
               </a:rPr>
-              <a:t>❯ </a:t>
+              <a:t xml:space="preserve">❯ </a:t>
             </a:r>
             <a:pPr algn="l" indent="0" marL="0">
               <a:lnSpc>
@@ -8883,7 +8883,7 @@
                 <a:ea typeface="Courier New" pitchFamily="34" charset="-122"/>
                 <a:cs typeface="Courier New" pitchFamily="34" charset="-120"/>
               </a:rPr>
-              <a:t>picked </a:t>
+              <a:t xml:space="preserve">picked </a:t>
             </a:r>
             <a:pPr algn="l" indent="0" marL="0">
               <a:lnSpc>
@@ -9257,7 +9257,7 @@
                 <a:ea typeface="Arial" pitchFamily="34" charset="-122"/>
                 <a:cs typeface="Arial" pitchFamily="34" charset="-120"/>
               </a:rPr>
-              <a:t>Claude Code’s terminal just echoes </a:t>
+              <a:t xml:space="preserve">Claude Code’s terminal just echoes </a:t>
             </a:r>
             <a:pPr algn="l" indent="0" marL="0">
               <a:lnSpc>
@@ -9274,7 +9274,7 @@
                 <a:ea typeface="Courier New" pitchFamily="34" charset="-122"/>
                 <a:cs typeface="Courier New" pitchFamily="34" charset="-120"/>
               </a:rPr>
-              <a:t>openrouter/auto </a:t>
+              <a:t xml:space="preserve">openrouter/auto </a:t>
             </a:r>
             <a:pPr algn="l" indent="0" marL="0">
               <a:lnSpc>
@@ -9447,7 +9447,7 @@
                 <a:ea typeface="Arial" pitchFamily="34" charset="-122"/>
                 <a:cs typeface="Arial" pitchFamily="34" charset="-120"/>
               </a:rPr>
-              <a:t>The response includes a </a:t>
+              <a:t xml:space="preserve">The response includes a </a:t>
             </a:r>
             <a:pPr algn="l" indent="0" marL="0">
               <a:lnSpc>
@@ -9464,7 +9464,7 @@
                 <a:ea typeface="Courier New" pitchFamily="34" charset="-122"/>
                 <a:cs typeface="Courier New" pitchFamily="34" charset="-120"/>
               </a:rPr>
-              <a:t>model </a:t>
+              <a:t xml:space="preserve">model </a:t>
             </a:r>
             <a:pPr algn="l" indent="0" marL="0">
               <a:lnSpc>
@@ -9681,7 +9681,7 @@
                 <a:ea typeface="Arial" pitchFamily="34" charset="-122"/>
                 <a:cs typeface="Arial" pitchFamily="34" charset="-120"/>
               </a:rPr>
-              <a:t>That gap </a:t>
+              <a:t xml:space="preserve">That gap </a:t>
             </a:r>
             <a:pPr algn="ctr" indent="0" marL="0">
               <a:lnSpc>
@@ -9698,7 +9698,7 @@
                 <a:ea typeface="Arial" pitchFamily="34" charset="-122"/>
                 <a:cs typeface="Arial" pitchFamily="34" charset="-120"/>
               </a:rPr>
-              <a:t>is </a:t>
+              <a:t xml:space="preserve">is </a:t>
             </a:r>
             <a:pPr algn="ctr" indent="0" marL="0">
               <a:lnSpc>
@@ -10243,7 +10243,7 @@
                 <a:ea typeface="Courier New" pitchFamily="34" charset="-122"/>
                 <a:cs typeface="Courier New" pitchFamily="34" charset="-120"/>
               </a:rPr>
-              <a:t>❯ </a:t>
+              <a:t xml:space="preserve">❯ </a:t>
             </a:r>
             <a:pPr algn="l" indent="0" marL="0">
               <a:lnSpc>
@@ -11394,7 +11394,7 @@
                 <a:ea typeface="Arial" pitchFamily="34" charset="-122"/>
                 <a:cs typeface="Arial" pitchFamily="34" charset="-120"/>
               </a:rPr>
-              <a:t>The </a:t>
+              <a:t xml:space="preserve">The </a:t>
             </a:r>
             <a:pPr algn="l" indent="0" marL="0">
               <a:lnSpc>
@@ -11411,7 +11411,7 @@
                 <a:ea typeface="Arial" pitchFamily="34" charset="-122"/>
                 <a:cs typeface="Arial" pitchFamily="34" charset="-120"/>
               </a:rPr>
-              <a:t>latest-model router </a:t>
+              <a:t xml:space="preserve">latest-model router </a:t>
             </a:r>
             <a:pPr algn="l" indent="0" marL="0">
               <a:lnSpc>
@@ -11428,7 +11428,7 @@
                 <a:ea typeface="Arial" pitchFamily="34" charset="-122"/>
                 <a:cs typeface="Arial" pitchFamily="34" charset="-120"/>
               </a:rPr>
-              <a:t>is the opposite of a mystery. You name the family with a </a:t>
+              <a:t xml:space="preserve">is the opposite of a mystery. You name the family with a </a:t>
             </a:r>
             <a:pPr algn="l" indent="0" marL="0">
               <a:lnSpc>
@@ -11445,7 +11445,7 @@
                 <a:ea typeface="Courier New" pitchFamily="34" charset="-122"/>
                 <a:cs typeface="Courier New" pitchFamily="34" charset="-120"/>
               </a:rPr>
-              <a:t>~ </a:t>
+              <a:t xml:space="preserve">~ </a:t>
             </a:r>
             <a:pPr algn="l" indent="0" marL="0">
               <a:lnSpc>
@@ -11638,7 +11638,7 @@
                 <a:ea typeface="Arial" pitchFamily="34" charset="-122"/>
                 <a:cs typeface="Arial" pitchFamily="34" charset="-120"/>
               </a:rPr>
-              <a:t>Unlike </a:t>
+              <a:t xml:space="preserve">Unlike </a:t>
             </a:r>
             <a:pPr algn="l" indent="0" marL="0">
               <a:lnSpc>
@@ -11655,7 +11655,7 @@
                 <a:ea typeface="Courier New" pitchFamily="34" charset="-122"/>
                 <a:cs typeface="Courier New" pitchFamily="34" charset="-120"/>
               </a:rPr>
-              <a:t>auto </a:t>
+              <a:t xml:space="preserve">auto </a:t>
             </a:r>
             <a:pPr algn="l" indent="0" marL="0">
               <a:lnSpc>
@@ -11672,7 +11672,7 @@
                 <a:ea typeface="Arial" pitchFamily="34" charset="-122"/>
                 <a:cs typeface="Arial" pitchFamily="34" charset="-120"/>
               </a:rPr>
-              <a:t>/ </a:t>
+              <a:t xml:space="preserve">/ </a:t>
             </a:r>
             <a:pPr algn="l" indent="0" marL="0">
               <a:lnSpc>
@@ -11706,7 +11706,7 @@
                 <a:ea typeface="Arial" pitchFamily="34" charset="-122"/>
                 <a:cs typeface="Arial" pitchFamily="34" charset="-120"/>
               </a:rPr>
-              <a:t>, it’s </a:t>
+              <a:t xml:space="preserve">, it’s </a:t>
             </a:r>
             <a:pPr algn="l" indent="0" marL="0">
               <a:lnSpc>
@@ -11723,7 +11723,7 @@
                 <a:ea typeface="Arial" pitchFamily="34" charset="-122"/>
                 <a:cs typeface="Arial" pitchFamily="34" charset="-120"/>
               </a:rPr>
-              <a:t>predictable </a:t>
+              <a:t xml:space="preserve">predictable </a:t>
             </a:r>
             <a:pPr algn="l" indent="0" marL="0">
               <a:lnSpc>
@@ -11959,7 +11959,7 @@
                 <a:ea typeface="Courier New" pitchFamily="34" charset="-122"/>
                 <a:cs typeface="Courier New" pitchFamily="34" charset="-120"/>
               </a:rPr>
-              <a:t>❯ </a:t>
+              <a:t xml:space="preserve">❯ </a:t>
             </a:r>
             <a:pPr algn="l" indent="0" marL="0">
               <a:lnSpc>
@@ -11976,7 +11976,7 @@
                 <a:ea typeface="Courier New" pitchFamily="34" charset="-122"/>
                 <a:cs typeface="Courier New" pitchFamily="34" charset="-120"/>
               </a:rPr>
-              <a:t>orclaude </a:t>
+              <a:t xml:space="preserve">orclaude </a:t>
             </a:r>
             <a:pPr algn="l" indent="0" marL="0">
               <a:lnSpc>
@@ -12054,7 +12054,7 @@
                 <a:ea typeface="Courier New" pitchFamily="34" charset="-122"/>
                 <a:cs typeface="Courier New" pitchFamily="34" charset="-120"/>
               </a:rPr>
-              <a:t>asked </a:t>
+              <a:t xml:space="preserve">asked </a:t>
             </a:r>
             <a:pPr algn="l" indent="0" marL="0">
               <a:lnSpc>
@@ -12132,7 +12132,7 @@
                 <a:ea typeface="Courier New" pitchFamily="34" charset="-122"/>
                 <a:cs typeface="Courier New" pitchFamily="34" charset="-120"/>
               </a:rPr>
-              <a:t>served claude-opus-4.5 </a:t>
+              <a:t xml:space="preserve">served claude-opus-4.5 </a:t>
             </a:r>
             <a:pPr algn="l" indent="0" marL="0">
               <a:lnSpc>
@@ -12932,7 +12932,7 @@
                 <a:ea typeface="Arial" pitchFamily="34" charset="-122"/>
                 <a:cs typeface="Arial" pitchFamily="34" charset="-120"/>
               </a:rPr>
-              <a:t>No ranking from me — the right answer depends on </a:t>
+              <a:t xml:space="preserve">No ranking from me — the right answer depends on </a:t>
             </a:r>
             <a:pPr algn="ctr" indent="0" marL="0">
               <a:lnSpc>
@@ -12949,7 +12949,7 @@
                 <a:ea typeface="Arial" pitchFamily="34" charset="-122"/>
                 <a:cs typeface="Arial" pitchFamily="34" charset="-120"/>
               </a:rPr>
-              <a:t>your </a:t>
+              <a:t xml:space="preserve">your </a:t>
             </a:r>
             <a:pPr algn="ctr" indent="0" marL="0">
               <a:lnSpc>
@@ -12966,7 +12966,7 @@
                 <a:ea typeface="Arial" pitchFamily="34" charset="-122"/>
                 <a:cs typeface="Arial" pitchFamily="34" charset="-120"/>
               </a:rPr>
-              <a:t>code, </a:t>
+              <a:t xml:space="preserve">code, </a:t>
             </a:r>
             <a:pPr algn="ctr" indent="0" marL="0">
               <a:lnSpc>
@@ -12983,7 +12983,7 @@
                 <a:ea typeface="Arial" pitchFamily="34" charset="-122"/>
                 <a:cs typeface="Arial" pitchFamily="34" charset="-120"/>
               </a:rPr>
-              <a:t>your </a:t>
+              <a:t xml:space="preserve">your </a:t>
             </a:r>
             <a:pPr algn="ctr" indent="0" marL="0">
               <a:lnSpc>
@@ -13000,7 +13000,7 @@
                 <a:ea typeface="Arial" pitchFamily="34" charset="-122"/>
                 <a:cs typeface="Arial" pitchFamily="34" charset="-120"/>
               </a:rPr>
-              <a:t>budget, and </a:t>
+              <a:t xml:space="preserve">budget, and </a:t>
             </a:r>
             <a:pPr algn="ctr" indent="0" marL="0">
               <a:lnSpc>
@@ -13017,7 +13017,7 @@
                 <a:ea typeface="Arial" pitchFamily="34" charset="-122"/>
                 <a:cs typeface="Arial" pitchFamily="34" charset="-120"/>
               </a:rPr>
-              <a:t>your </a:t>
+              <a:t xml:space="preserve">your </a:t>
             </a:r>
             <a:pPr algn="ctr" indent="0" marL="0">
               <a:lnSpc>
@@ -13100,7 +13100,7 @@
       </p:sp>
       <p:pic>
         <p:nvPicPr>
-          <p:cNvPr id="3" name="Image 0" descr="preencoded.png">    </p:cNvPr>
+          <p:cNvPr id="3" name="Image 0" descr="preencoded.png"/>
           <p:cNvPicPr>
             <a:picLocks noChangeAspect="1"/>
           </p:cNvPicPr>
@@ -13265,7 +13265,7 @@
                 <a:ea typeface="Arial" pitchFamily="34" charset="-122"/>
                 <a:cs typeface="Arial" pitchFamily="34" charset="-120"/>
               </a:rPr>
-              <a:t>O’Reilly Media — this whole topic lands in </a:t>
+              <a:t xml:space="preserve">O’Reilly Media — this whole topic lands in </a:t>
             </a:r>
             <a:pPr algn="l" indent="0" marL="0">
               <a:lnSpc>
@@ -13282,7 +13282,7 @@
                 <a:ea typeface="Arial" pitchFamily="34" charset="-122"/>
                 <a:cs typeface="Arial" pitchFamily="34" charset="-120"/>
               </a:rPr>
-              <a:t>Chapter 12 </a:t>
+              <a:t xml:space="preserve">Chapter 12 </a:t>
             </a:r>
             <a:pPr algn="l" indent="0" marL="0">
               <a:lnSpc>
@@ -13569,7 +13569,7 @@
                 <a:ea typeface="Arial" pitchFamily="34" charset="-122"/>
                 <a:cs typeface="Arial" pitchFamily="34" charset="-120"/>
               </a:rPr>
-              <a:t>Grab </a:t>
+              <a:t xml:space="preserve">Grab </a:t>
             </a:r>
             <a:pPr algn="l" indent="0" marL="0">
               <a:lnSpc>
@@ -13586,7 +13586,7 @@
                 <a:ea typeface="Courier New" pitchFamily="34" charset="-122"/>
                 <a:cs typeface="Courier New" pitchFamily="34" charset="-120"/>
               </a:rPr>
-              <a:t>orclaude </a:t>
+              <a:t xml:space="preserve">orclaude </a:t>
             </a:r>
             <a:pPr algn="l" indent="0" marL="0">
               <a:lnSpc>
@@ -13759,7 +13759,7 @@
                 <a:ea typeface="Arial" pitchFamily="34" charset="-122"/>
                 <a:cs typeface="Arial" pitchFamily="34" charset="-120"/>
               </a:rPr>
-              <a:t>Spring AI 2.0 — where you </a:t>
+              <a:t xml:space="preserve">Spring AI 2.0 — where you </a:t>
             </a:r>
             <a:pPr algn="l" indent="0" marL="0">
               <a:lnSpc>
@@ -13776,7 +13776,7 @@
                 <a:ea typeface="Arial" pitchFamily="34" charset="-122"/>
                 <a:cs typeface="Arial" pitchFamily="34" charset="-120"/>
               </a:rPr>
-              <a:t>can </a:t>
+              <a:t xml:space="preserve">can </a:t>
             </a:r>
             <a:pPr algn="l" indent="0" marL="0">
               <a:lnSpc>
@@ -13949,7 +13949,7 @@
                 <a:ea typeface="Arial" pitchFamily="34" charset="-122"/>
                 <a:cs typeface="Arial" pitchFamily="34" charset="-120"/>
               </a:rPr>
-              <a:t>The example repo and </a:t>
+              <a:t xml:space="preserve">The example repo and </a:t>
             </a:r>
             <a:pPr algn="l" indent="0" marL="0">
               <a:lnSpc>
@@ -13966,7 +13966,7 @@
                 <a:ea typeface="Arial" pitchFamily="34" charset="-122"/>
                 <a:cs typeface="Arial" pitchFamily="34" charset="-120"/>
               </a:rPr>
-              <a:t>Claude Code: Up and Running </a:t>
+              <a:t xml:space="preserve">Claude Code: Up and Running </a:t>
             </a:r>
             <a:pPr algn="l" indent="0" marL="0">
               <a:lnSpc>
@@ -14085,7 +14085,7 @@
                 <a:ea typeface="Arial" pitchFamily="34" charset="-122"/>
                 <a:cs typeface="Arial" pitchFamily="34" charset="-120"/>
               </a:rPr>
-              <a:t>Subscribe — I’ll see you in the next one </a:t>
+              <a:t xml:space="preserve">Subscribe — I’ll see you in the next one </a:t>
             </a:r>
             <a:pPr algn="l" indent="0" marL="0">
               <a:buNone/>
@@ -14219,7 +14219,7 @@
                 <a:ea typeface="Arial" pitchFamily="34" charset="-122"/>
                 <a:cs typeface="Arial" pitchFamily="34" charset="-120"/>
               </a:rPr>
-              <a:t>This isn’t a leaderboard. It’s </a:t>
+              <a:t xml:space="preserve">This isn’t a leaderboard. It’s </a:t>
             </a:r>
             <a:pPr algn="l" indent="0" marL="0">
               <a:lnSpc>
@@ -15172,7 +15172,7 @@
                 <a:ea typeface="Arial" pitchFamily="34" charset="-122"/>
                 <a:cs typeface="Arial" pitchFamily="34" charset="-120"/>
               </a:rPr>
-              <a:t>Hand it an OpenRouter key, name the model you want — </a:t>
+              <a:t xml:space="preserve">Hand it an OpenRouter key, name the model you want — </a:t>
             </a:r>
             <a:pPr algn="ctr" indent="0" marL="0">
               <a:lnSpc>
@@ -15502,7 +15502,7 @@
                 <a:ea typeface="Arial" pitchFamily="34" charset="-122"/>
                 <a:cs typeface="Arial" pitchFamily="34" charset="-120"/>
               </a:rPr>
-              <a:t>Set </a:t>
+              <a:t xml:space="preserve">The slug you pass becomes </a:t>
             </a:r>
             <a:pPr algn="l" indent="0" marL="0">
               <a:lnSpc>
@@ -15519,7 +15519,7 @@
                 <a:ea typeface="Courier New" pitchFamily="34" charset="-122"/>
                 <a:cs typeface="Courier New" pitchFamily="34" charset="-120"/>
               </a:rPr>
-              <a:t>ANTHROPIC_MODEL </a:t>
+              <a:t>--model</a:t>
             </a:r>
             <a:pPr algn="l" indent="0" marL="0">
               <a:lnSpc>
@@ -15536,7 +15536,7 @@
                 <a:ea typeface="Arial" pitchFamily="34" charset="-122"/>
                 <a:cs typeface="Arial" pitchFamily="34" charset="-120"/>
               </a:rPr>
-              <a:t>to the slug you passed in — the model </a:t>
+              <a:t xml:space="preserve"> — it outranks a model pinned in settings. The model </a:t>
             </a:r>
             <a:pPr algn="l" indent="0" marL="0">
               <a:lnSpc>
@@ -15553,7 +15553,7 @@
                 <a:ea typeface="Arial" pitchFamily="34" charset="-122"/>
                 <a:cs typeface="Arial" pitchFamily="34" charset="-120"/>
               </a:rPr>
-              <a:t>you </a:t>
+              <a:t xml:space="preserve">you </a:t>
             </a:r>
             <a:pPr algn="l" indent="0" marL="0">
               <a:lnSpc>
@@ -15658,7 +15658,7 @@
                 <a:ea typeface="Courier New" pitchFamily="34" charset="-122"/>
                 <a:cs typeface="Courier New" pitchFamily="34" charset="-120"/>
               </a:rPr>
-              <a:t>exec claude </a:t>
+              <a:t xml:space="preserve">exec claude </a:t>
             </a:r>
             <a:pPr algn="l" indent="0" marL="0">
               <a:lnSpc>
@@ -15675,7 +15675,7 @@
                 <a:ea typeface="Arial" pitchFamily="34" charset="-122"/>
                 <a:cs typeface="Arial" pitchFamily="34" charset="-120"/>
               </a:rPr>
-              <a:t>— that’s it. No remapping, no aliases, no </a:t>
+              <a:t xml:space="preserve">hands off — same trick </a:t>
             </a:r>
             <a:pPr algn="l" indent="0" marL="0">
               <a:lnSpc>
@@ -15692,7 +15692,7 @@
                 <a:ea typeface="Courier New" pitchFamily="34" charset="-122"/>
                 <a:cs typeface="Courier New" pitchFamily="34" charset="-120"/>
               </a:rPr>
-              <a:t>case </a:t>
+              <a:t xml:space="preserve">ollama launch </a:t>
             </a:r>
             <a:pPr algn="l" indent="0" marL="0">
               <a:lnSpc>
@@ -15709,7 +15709,7 @@
                 <a:ea typeface="Arial" pitchFamily="34" charset="-122"/>
                 <a:cs typeface="Arial" pitchFamily="34" charset="-120"/>
               </a:rPr>
-              <a:t>block.</a:t>
+              <a:t>uses.</a:t>
             </a:r>
             <a:endParaRPr lang="en-US" sz="2100" dirty="0"/>
           </a:p>
@@ -15773,7 +15773,7 @@
                 <a:ea typeface="Arial" pitchFamily="34" charset="-122"/>
                 <a:cs typeface="Arial" pitchFamily="34" charset="-120"/>
               </a:rPr>
-              <a:t>Slugs drift over time. These were live on record day — check OpenRouter for current names.</a:t>
+              <a:t>Receipts, not vibes — scripts/orclaude-smoke &lt;slug&gt; reports the model actually billed.</a:t>
             </a:r>
             <a:endParaRPr lang="en-US" sz="1575" dirty="0"/>
           </a:p>
@@ -16080,7 +16080,7 @@
                 <a:ea typeface="Courier New" pitchFamily="34" charset="-122"/>
                 <a:cs typeface="Courier New" pitchFamily="34" charset="-120"/>
               </a:rPr>
-              <a:t>export </a:t>
+              <a:t xml:space="preserve">export </a:t>
             </a:r>
             <a:pPr algn="l" indent="0" marL="0">
               <a:lnSpc>
@@ -16131,7 +16131,7 @@
                 <a:ea typeface="Courier New" pitchFamily="34" charset="-122"/>
                 <a:cs typeface="Courier New" pitchFamily="34" charset="-120"/>
               </a:rPr>
-              <a:t>openrouter.ai/api/v1</a:t>
+              <a:t>openrouter.ai/api</a:t>
             </a:r>
             <a:endParaRPr lang="en-US" sz="1650" dirty="0"/>
           </a:p>
@@ -16175,7 +16175,7 @@
                 <a:ea typeface="Courier New" pitchFamily="34" charset="-122"/>
                 <a:cs typeface="Courier New" pitchFamily="34" charset="-120"/>
               </a:rPr>
-              <a:t>export </a:t>
+              <a:t xml:space="preserve">export </a:t>
             </a:r>
             <a:pPr algn="l" indent="0" marL="0">
               <a:lnSpc>
@@ -16308,13 +16308,13 @@
             <a:r>
               <a:rPr lang="en-US" sz="1650" dirty="0">
                 <a:solidFill>
-                  <a:srgbClr val="C98A6A"/>
+                  <a:srgbClr val="E8ECEF"/>
                 </a:solidFill>
                 <a:latin typeface="Courier New" pitchFamily="34" charset="0"/>
                 <a:ea typeface="Courier New" pitchFamily="34" charset="-122"/>
                 <a:cs typeface="Courier New" pitchFamily="34" charset="-120"/>
               </a:rPr>
-              <a:t>export </a:t>
+              <a:t>MODEL</a:t>
             </a:r>
             <a:pPr algn="l" indent="0" marL="0">
               <a:lnSpc>
@@ -16325,13 +16325,13 @@
             <a:r>
               <a:rPr lang="en-US" sz="1650" dirty="0">
                 <a:solidFill>
-                  <a:srgbClr val="E8ECEF"/>
+                  <a:srgbClr val="C98A6A"/>
                 </a:solidFill>
                 <a:latin typeface="Courier New" pitchFamily="34" charset="0"/>
                 <a:ea typeface="Courier New" pitchFamily="34" charset="-122"/>
                 <a:cs typeface="Courier New" pitchFamily="34" charset="-120"/>
               </a:rPr>
-              <a:t>ANTHROPIC_MODEL</a:t>
+              <a:t>=</a:t>
             </a:r>
             <a:pPr algn="l" indent="0" marL="0">
               <a:lnSpc>
@@ -16342,30 +16342,24 @@
             <a:r>
               <a:rPr lang="en-US" sz="1650" dirty="0">
                 <a:solidFill>
-                  <a:srgbClr val="C98A6A"/>
+                  <a:srgbClr val="8FD08A"/>
                 </a:solidFill>
                 <a:latin typeface="Courier New" pitchFamily="34" charset="0"/>
                 <a:ea typeface="Courier New" pitchFamily="34" charset="-122"/>
                 <a:cs typeface="Courier New" pitchFamily="34" charset="-120"/>
               </a:rPr>
-              <a:t>=</a:t>
-            </a:r>
-            <a:pPr algn="l" indent="0" marL="0">
-              <a:lnSpc>
-                <a:spcPct val="170000"/>
-              </a:lnSpc>
-              <a:buNone/>
-            </a:pPr>
+              <a:t>"$1"</a:t>
+            </a:r>
             <a:r>
               <a:rPr lang="en-US" sz="1650" dirty="0">
                 <a:solidFill>
-                  <a:srgbClr val="8FD08A"/>
+                  <a:srgbClr val="7FB7D8"/>
                 </a:solidFill>
                 <a:latin typeface="Courier New" pitchFamily="34" charset="0"/>
                 <a:ea typeface="Courier New" pitchFamily="34" charset="-122"/>
                 <a:cs typeface="Courier New" pitchFamily="34" charset="-120"/>
               </a:rPr>
-              <a:t>"$1"</a:t>
+              <a:t>; shift</a:t>
             </a:r>
             <a:endParaRPr lang="en-US" sz="1650" dirty="0"/>
           </a:p>
@@ -16403,119 +16397,74 @@
             <a:r>
               <a:rPr lang="en-US" sz="1650" dirty="0">
                 <a:solidFill>
-                  <a:srgbClr val="7FB7D8"/>
+                  <a:srgbClr val="C98A6A"/>
                 </a:solidFill>
                 <a:latin typeface="Courier New" pitchFamily="34" charset="0"/>
                 <a:ea typeface="Courier New" pitchFamily="34" charset="-122"/>
                 <a:cs typeface="Courier New" pitchFamily="34" charset="-120"/>
               </a:rPr>
-              <a:t>shift </a:t>
-            </a:r>
-            <a:pPr algn="l" indent="0" marL="0">
-              <a:lnSpc>
-                <a:spcPct val="170000"/>
-              </a:lnSpc>
-              <a:buNone/>
-            </a:pPr>
+              <a:t xml:space="preserve">export </a:t>
+            </a:r>
             <a:r>
               <a:rPr lang="en-US" sz="1650" dirty="0">
                 <a:solidFill>
-                  <a:srgbClr val="5C656C"/>
+                  <a:srgbClr val="E8ECEF"/>
                 </a:solidFill>
                 <a:latin typeface="Courier New" pitchFamily="34" charset="0"/>
                 <a:ea typeface="Courier New" pitchFamily="34" charset="-122"/>
                 <a:cs typeface="Courier New" pitchFamily="34" charset="-120"/>
               </a:rPr>
-              <a:t># drop the model arg</a:t>
-            </a:r>
-            <a:endParaRPr lang="en-US" sz="1650" dirty="0"/>
-          </a:p>
-        </p:txBody>
-      </p:sp>
-      <p:sp>
-        <p:nvSpPr>
-          <p:cNvPr id="27" name="Text 25"/>
-          <p:cNvSpPr/>
-          <p:nvPr/>
-        </p:nvSpPr>
-        <p:spPr>
-          <a:xfrm>
-            <a:off x="10599662" y="6493743"/>
-            <a:ext cx="6615869" cy="394419"/>
-          </a:xfrm>
-          <a:prstGeom prst="rect">
-            <a:avLst/>
-          </a:prstGeom>
-          <a:noFill/>
-          <a:ln/>
-        </p:spPr>
-        <p:txBody>
-          <a:bodyPr wrap="square" lIns="25400" tIns="25400" rIns="25400" bIns="25400" rtlCol="0" anchor="t">
-            <a:normAutofit/>
-          </a:bodyPr>
-          <a:lstStyle/>
-          <a:p>
-            <a:pPr algn="l" indent="0" marL="0">
-              <a:lnSpc>
-                <a:spcPct val="170000"/>
-              </a:lnSpc>
-              <a:buNone/>
-            </a:pPr>
+              <a:t>ANTHROPIC_DEFAULT_*_MODEL</a:t>
+            </a:r>
             <a:r>
               <a:rPr lang="en-US" sz="1650" dirty="0">
                 <a:solidFill>
-                  <a:srgbClr val="5C656C"/>
+                  <a:srgbClr val="C98A6A"/>
                 </a:solidFill>
                 <a:latin typeface="Courier New" pitchFamily="34" charset="0"/>
                 <a:ea typeface="Courier New" pitchFamily="34" charset="-122"/>
                 <a:cs typeface="Courier New" pitchFamily="34" charset="-120"/>
               </a:rPr>
-              <a:t># hand off to Claude Code</a:t>
-            </a:r>
-            <a:endParaRPr lang="en-US" sz="1650" dirty="0"/>
-          </a:p>
-        </p:txBody>
-      </p:sp>
-      <p:sp>
-        <p:nvSpPr>
-          <p:cNvPr id="28" name="Text 26"/>
-          <p:cNvSpPr/>
-          <p:nvPr/>
-        </p:nvSpPr>
-        <p:spPr>
-          <a:xfrm>
-            <a:off x="10599662" y="6850062"/>
-            <a:ext cx="6615869" cy="394419"/>
-          </a:xfrm>
-          <a:prstGeom prst="rect">
-            <a:avLst/>
-          </a:prstGeom>
-          <a:noFill/>
-          <a:ln/>
-        </p:spPr>
-        <p:txBody>
-          <a:bodyPr wrap="square" lIns="25400" tIns="25400" rIns="25400" bIns="25400" rtlCol="0" anchor="t">
-            <a:normAutofit/>
-          </a:bodyPr>
-          <a:lstStyle/>
-          <a:p>
-            <a:pPr algn="l" indent="0" marL="0">
-              <a:lnSpc>
-                <a:spcPct val="170000"/>
-              </a:lnSpc>
-              <a:buNone/>
-            </a:pPr>
+              <a:t>=</a:t>
+            </a:r>
             <a:r>
               <a:rPr lang="en-US" sz="1650" dirty="0">
                 <a:solidFill>
-                  <a:srgbClr val="E8ECEF"/>
+                  <a:srgbClr val="8FD08A"/>
                 </a:solidFill>
                 <a:latin typeface="Courier New" pitchFamily="34" charset="0"/>
                 <a:ea typeface="Courier New" pitchFamily="34" charset="-122"/>
                 <a:cs typeface="Courier New" pitchFamily="34" charset="-120"/>
               </a:rPr>
-              <a:t>exec claude </a:t>
-            </a:r>
+              <a:t>"$MODEL"</a:t>
+            </a:r>
+            <a:endParaRPr lang="en-US" sz="1650" dirty="0"/>
+          </a:p>
+        </p:txBody>
+      </p:sp>
+      <p:sp>
+        <p:nvSpPr>
+          <p:cNvPr id="27" name="Text 25"/>
+          <p:cNvSpPr/>
+          <p:nvPr/>
+        </p:nvSpPr>
+        <p:spPr>
+          <a:xfrm>
+            <a:off x="10599662" y="6493743"/>
+            <a:ext cx="6615869" cy="394419"/>
+          </a:xfrm>
+          <a:prstGeom prst="rect">
+            <a:avLst/>
+          </a:prstGeom>
+          <a:noFill/>
+          <a:ln/>
+        </p:spPr>
+        <p:txBody>
+          <a:bodyPr wrap="square" lIns="25400" tIns="25400" rIns="25400" bIns="25400" rtlCol="0" anchor="t">
+            <a:normAutofit/>
+          </a:bodyPr>
+          <a:lstStyle/>
+          <a:p>
             <a:pPr algn="l" indent="0" marL="0">
               <a:lnSpc>
                 <a:spcPct val="170000"/>
@@ -16525,13 +16474,85 @@
             <a:r>
               <a:rPr lang="en-US" sz="1650" dirty="0">
                 <a:solidFill>
-                  <a:srgbClr val="8FD08A"/>
+                  <a:srgbClr val="5C656C"/>
                 </a:solidFill>
                 <a:latin typeface="Courier New" pitchFamily="34" charset="0"/>
                 <a:ea typeface="Courier New" pitchFamily="34" charset="-122"/>
                 <a:cs typeface="Courier New" pitchFamily="34" charset="-120"/>
               </a:rPr>
-              <a:t>"$@"</a:t>
+              <a:t># hand off — the flag outranks settings.json</a:t>
+            </a:r>
+            <a:endParaRPr lang="en-US" sz="1650" dirty="0"/>
+          </a:p>
+        </p:txBody>
+      </p:sp>
+      <p:sp>
+        <p:nvSpPr>
+          <p:cNvPr id="28" name="Text 26"/>
+          <p:cNvSpPr/>
+          <p:nvPr/>
+        </p:nvSpPr>
+        <p:spPr>
+          <a:xfrm>
+            <a:off x="10599662" y="6850062"/>
+            <a:ext cx="6615869" cy="394419"/>
+          </a:xfrm>
+          <a:prstGeom prst="rect">
+            <a:avLst/>
+          </a:prstGeom>
+          <a:noFill/>
+          <a:ln/>
+        </p:spPr>
+        <p:txBody>
+          <a:bodyPr wrap="square" lIns="25400" tIns="25400" rIns="25400" bIns="25400" rtlCol="0" anchor="t">
+            <a:normAutofit/>
+          </a:bodyPr>
+          <a:lstStyle/>
+          <a:p>
+            <a:pPr algn="l" indent="0" marL="0">
+              <a:lnSpc>
+                <a:spcPct val="170000"/>
+              </a:lnSpc>
+              <a:buNone/>
+            </a:pPr>
+            <a:r>
+              <a:rPr lang="en-US" sz="1650" dirty="0">
+                <a:solidFill>
+                  <a:srgbClr val="E8ECEF"/>
+                </a:solidFill>
+                <a:latin typeface="Courier New" pitchFamily="34" charset="0"/>
+                <a:ea typeface="Courier New" pitchFamily="34" charset="-122"/>
+                <a:cs typeface="Courier New" pitchFamily="34" charset="-120"/>
+              </a:rPr>
+              <a:t xml:space="preserve">exec claude </a:t>
+            </a:r>
+            <a:r>
+              <a:rPr lang="en-US" sz="1650" dirty="0">
+                <a:solidFill>
+                  <a:srgbClr val="7FB7D8"/>
+                </a:solidFill>
+                <a:latin typeface="Courier New" pitchFamily="34" charset="0"/>
+                <a:ea typeface="Courier New" pitchFamily="34" charset="-122"/>
+                <a:cs typeface="Courier New" pitchFamily="34" charset="-120"/>
+              </a:rPr>
+              <a:t xml:space="preserve">--model </a:t>
+            </a:r>
+            <a:pPr algn="l" indent="0" marL="0">
+              <a:lnSpc>
+                <a:spcPct val="170000"/>
+              </a:lnSpc>
+              <a:buNone/>
+            </a:pPr>
+            <a:r>
+              <a:rPr lang="en-US" sz="1650" dirty="0">
+                <a:solidFill>
+                  <a:srgbClr val="8FD08A"/>
+                </a:solidFill>
+                <a:latin typeface="Courier New" pitchFamily="34" charset="0"/>
+                <a:ea typeface="Courier New" pitchFamily="34" charset="-122"/>
+                <a:cs typeface="Courier New" pitchFamily="34" charset="-120"/>
+              </a:rPr>
+              <a:t>"$MODEL" "$@"</a:t>
             </a:r>
             <a:endParaRPr lang="en-US" sz="1650" dirty="0"/>
           </a:p>
@@ -16756,7 +16777,7 @@
                 <a:ea typeface="Arial" pitchFamily="34" charset="-122"/>
                 <a:cs typeface="Arial" pitchFamily="34" charset="-120"/>
               </a:rPr>
-              <a:t>Claude Code reads the same three variables from an </a:t>
+              <a:t xml:space="preserve">Claude Code reads the same three variables from an </a:t>
             </a:r>
             <a:pPr algn="l" indent="0" marL="0">
               <a:lnSpc>
@@ -16773,7 +16794,7 @@
                 <a:ea typeface="Courier New" pitchFamily="34" charset="-122"/>
                 <a:cs typeface="Courier New" pitchFamily="34" charset="-120"/>
               </a:rPr>
-              <a:t>env </a:t>
+              <a:t xml:space="preserve">env </a:t>
             </a:r>
             <a:pPr algn="l" indent="0" marL="0">
               <a:lnSpc>
@@ -16790,7 +16811,7 @@
                 <a:ea typeface="Arial" pitchFamily="34" charset="-122"/>
                 <a:cs typeface="Arial" pitchFamily="34" charset="-120"/>
               </a:rPr>
-              <a:t>block in </a:t>
+              <a:t xml:space="preserve">block in </a:t>
             </a:r>
             <a:pPr algn="l" indent="0" marL="0">
               <a:lnSpc>
@@ -16912,7 +16933,7 @@
                 <a:ea typeface="Arial" pitchFamily="34" charset="-122"/>
                 <a:cs typeface="Arial" pitchFamily="34" charset="-120"/>
               </a:rPr>
-              <a:t>The </a:t>
+              <a:t xml:space="preserve">The </a:t>
             </a:r>
             <a:pPr algn="l" indent="0" marL="0">
               <a:lnSpc>
@@ -16929,7 +16950,7 @@
                 <a:ea typeface="Courier New" pitchFamily="34" charset="-122"/>
                 <a:cs typeface="Courier New" pitchFamily="34" charset="-120"/>
               </a:rPr>
-              <a:t>.local </a:t>
+              <a:t xml:space="preserve">.local </a:t>
             </a:r>
             <a:pPr algn="l" indent="0" marL="0">
               <a:lnSpc>
@@ -17034,7 +17055,7 @@
                 <a:ea typeface="Arial" pitchFamily="34" charset="-122"/>
                 <a:cs typeface="Arial" pitchFamily="34" charset="-120"/>
               </a:rPr>
-              <a:t>Persistent and per-project, instead of per-command. Same effect — pick whichever fits.</a:t>
+              <a:t>Persistent and per-project, instead of per-command. A template ships in the example repo.</a:t>
             </a:r>
             <a:endParaRPr lang="en-US" sz="2100" dirty="0"/>
           </a:p>
@@ -17098,7 +17119,7 @@
                 <a:ea typeface="Courier New" pitchFamily="34" charset="-122"/>
                 <a:cs typeface="Courier New" pitchFamily="34" charset="-120"/>
               </a:rPr>
-              <a:t>ANTHROPIC_* </a:t>
+              <a:t xml:space="preserve">ANTHROPIC_* </a:t>
             </a:r>
             <a:pPr algn="l" indent="0" marL="0">
               <a:lnSpc>
@@ -17115,7 +17136,7 @@
                 <a:ea typeface="Arial" pitchFamily="34" charset="-122"/>
                 <a:cs typeface="Arial" pitchFamily="34" charset="-120"/>
               </a:rPr>
-              <a:t>is just the variable name Claude Code reads — the value is your </a:t>
+              <a:t xml:space="preserve">is just the variable name Claude Code reads — the value is your </a:t>
             </a:r>
             <a:pPr algn="l" indent="0" marL="0">
               <a:lnSpc>
@@ -17132,7 +17153,7 @@
                 <a:ea typeface="Arial" pitchFamily="34" charset="-122"/>
                 <a:cs typeface="Arial" pitchFamily="34" charset="-120"/>
               </a:rPr>
-              <a:t>OpenRouter </a:t>
+              <a:t xml:space="preserve">OpenRouter </a:t>
             </a:r>
             <a:pPr algn="l" indent="0" marL="0">
               <a:lnSpc>
@@ -17490,7 +17511,7 @@
                 <a:ea typeface="Courier New" pitchFamily="34" charset="-122"/>
                 <a:cs typeface="Courier New" pitchFamily="34" charset="-120"/>
               </a:rPr>
-              <a:t>: </a:t>
+              <a:t xml:space="preserve">: </a:t>
             </a:r>
             <a:pPr algn="l" indent="0" marL="0">
               <a:lnSpc>
@@ -17507,7 +17528,7 @@
                 <a:ea typeface="Courier New" pitchFamily="34" charset="-122"/>
                 <a:cs typeface="Courier New" pitchFamily="34" charset="-120"/>
               </a:rPr>
-              <a:t>"openrouter.ai/api/v1"</a:t>
+              <a:t>"openrouter.ai/api"</a:t>
             </a:r>
             <a:pPr algn="l" indent="0" marL="0">
               <a:lnSpc>
@@ -17585,7 +17606,7 @@
                 <a:ea typeface="Courier New" pitchFamily="34" charset="-122"/>
                 <a:cs typeface="Courier New" pitchFamily="34" charset="-120"/>
               </a:rPr>
-              <a:t>: </a:t>
+              <a:t xml:space="preserve">: </a:t>
             </a:r>
             <a:pPr algn="l" indent="0" marL="0">
               <a:lnSpc>
@@ -17680,7 +17701,7 @@
                 <a:ea typeface="Courier New" pitchFamily="34" charset="-122"/>
                 <a:cs typeface="Courier New" pitchFamily="34" charset="-120"/>
               </a:rPr>
-              <a:t>: </a:t>
+              <a:t xml:space="preserve">: </a:t>
             </a:r>
             <a:pPr algn="l" indent="0" marL="0">
               <a:lnSpc>
@@ -18178,7 +18199,7 @@
                 <a:ea typeface="Arial" pitchFamily="34" charset="-122"/>
                 <a:cs typeface="Arial" pitchFamily="34" charset="-120"/>
               </a:rPr>
-              <a:t>Implement </a:t>
+              <a:t xml:space="preserve">Implement </a:t>
             </a:r>
             <a:pPr algn="l" indent="0" marL="0">
               <a:lnSpc>
@@ -18195,7 +18216,7 @@
                 <a:ea typeface="Courier New" pitchFamily="34" charset="-122"/>
                 <a:cs typeface="Courier New" pitchFamily="34" charset="-120"/>
               </a:rPr>
-              <a:t>parseDuration </a:t>
+              <a:t xml:space="preserve">parseDuration </a:t>
             </a:r>
             <a:pPr algn="l" indent="0" marL="0">
               <a:lnSpc>
@@ -18212,7 +18233,7 @@
                 <a:ea typeface="Arial" pitchFamily="34" charset="-122"/>
                 <a:cs typeface="Arial" pitchFamily="34" charset="-120"/>
               </a:rPr>
-              <a:t>so it turns a string like </a:t>
+              <a:t xml:space="preserve">so it turns a string like </a:t>
             </a:r>
             <a:pPr algn="l" indent="0" marL="0">
               <a:lnSpc>
@@ -18229,7 +18250,7 @@
                 <a:ea typeface="Courier New" pitchFamily="34" charset="-122"/>
                 <a:cs typeface="Courier New" pitchFamily="34" charset="-120"/>
               </a:rPr>
-              <a:t>1h30m </a:t>
+              <a:t xml:space="preserve">1h30m </a:t>
             </a:r>
             <a:pPr algn="l" indent="0" marL="0">
               <a:lnSpc>
@@ -18246,7 +18267,7 @@
                 <a:ea typeface="Arial" pitchFamily="34" charset="-122"/>
                 <a:cs typeface="Arial" pitchFamily="34" charset="-120"/>
               </a:rPr>
-              <a:t>or </a:t>
+              <a:t xml:space="preserve">or </a:t>
             </a:r>
             <a:pPr algn="l" indent="0" marL="0">
               <a:lnSpc>
@@ -18263,7 +18284,7 @@
                 <a:ea typeface="Courier New" pitchFamily="34" charset="-122"/>
                 <a:cs typeface="Courier New" pitchFamily="34" charset="-120"/>
               </a:rPr>
-              <a:t>45s </a:t>
+              <a:t xml:space="preserve">45s </a:t>
             </a:r>
             <a:pPr algn="l" indent="0" marL="0">
               <a:lnSpc>

--- a/youtube/Claude_Code_with_OpenRouter.pptx
+++ b/youtube/Claude_Code_with_OpenRouter.pptx
@@ -1845,7 +1845,7 @@
           <a:p>
             <a:r>
               <a:rPr lang="en-US" dirty="0"/>
-              <a:t>This ties into my book, Claude Code: Up and Running, from O'Reilly. The OpenRouter material lands in Chapter 12, coming to the early release a bit later. The orclaude script is in the book's example repo.</a:t>
+              <a:t>This ties into my book, Claude Code: Up and Running, from O'Reilly. The OpenRouter material lands in Chapter 11, coming to the early release a bit later. The orclaude script is in the book's example repo.</a:t>
             </a:r>
             <a:endParaRPr lang="en-US" dirty="0"/>
           </a:p>
@@ -13282,7 +13282,7 @@
                 <a:ea typeface="Arial" pitchFamily="34" charset="-122"/>
                 <a:cs typeface="Arial" pitchFamily="34" charset="-120"/>
               </a:rPr>
-              <a:t xml:space="preserve">Chapter 12 </a:t>
+              <a:t xml:space="preserve">Chapter 11 </a:t>
             </a:r>
             <a:pPr algn="l" indent="0" marL="0">
               <a:lnSpc>
